--- a/media/exports/reports/2026-05/growth-services.pptx
+++ b/media/exports/reports/2026-05/growth-services.pptx
@@ -234,64 +234,64 @@
                 <c:formatCode>$#,##0;[Red]($#,##0);"-"</c:formatCode>
                 <c:ptCount val="20"/>
                 <c:pt idx="0">
-                  <c:v>94520</c:v>
+                  <c:v>103550</c:v>
                 </c:pt>
                 <c:pt idx="1">
-                  <c:v>108140</c:v>
+                  <c:v>118390</c:v>
                 </c:pt>
                 <c:pt idx="2">
-                  <c:v>114895</c:v>
+                  <c:v>125715</c:v>
                 </c:pt>
                 <c:pt idx="3">
-                  <c:v>88250</c:v>
+                  <c:v>96560</c:v>
                 </c:pt>
                 <c:pt idx="4">
-                  <c:v>111010</c:v>
+                  <c:v>121275</c:v>
                 </c:pt>
                 <c:pt idx="5">
-                  <c:v>77175</c:v>
+                  <c:v>84340</c:v>
                 </c:pt>
                 <c:pt idx="6">
-                  <c:v>63970</c:v>
+                  <c:v>69985</c:v>
                 </c:pt>
                 <c:pt idx="7">
-                  <c:v>95555</c:v>
+                  <c:v>104970</c:v>
                 </c:pt>
                 <c:pt idx="8">
-                  <c:v>90220</c:v>
+                  <c:v>99060</c:v>
                 </c:pt>
                 <c:pt idx="9">
-                  <c:v>86320</c:v>
+                  <c:v>94805</c:v>
                 </c:pt>
                 <c:pt idx="10">
-                  <c:v>61475</c:v>
+                  <c:v>67745</c:v>
                 </c:pt>
                 <c:pt idx="11">
-                  <c:v>59535</c:v>
+                  <c:v>65650</c:v>
                 </c:pt>
                 <c:pt idx="12">
-                  <c:v>71260</c:v>
+                  <c:v>78550</c:v>
                 </c:pt>
                 <c:pt idx="13">
-                  <c:v>83940</c:v>
+                  <c:v>92575</c:v>
                 </c:pt>
                 <c:pt idx="14">
-                  <c:v>69420</c:v>
+                  <c:v>76600</c:v>
                 </c:pt>
                 <c:pt idx="15">
-                  <c:v>92370</c:v>
+                  <c:v>102350</c:v>
                 </c:pt>
                 <c:pt idx="16">
-                  <c:v>100055</c:v>
+                  <c:v>110835</c:v>
                 </c:pt>
                 <c:pt idx="17">
-                  <c:v>109865</c:v>
+                  <c:v>121215</c:v>
                 </c:pt>
                 <c:pt idx="18">
-                  <c:v>80590</c:v>
+                  <c:v>88665</c:v>
                 </c:pt>
                 <c:pt idx="19">
-                  <c:v>77090</c:v>
+                  <c:v>84920</c:v>
                 </c:pt>
               </c:numCache>
             </c:numRef>
@@ -340,7 +340,7 @@
         <c:axId val="-2100718248"/>
         <c:scaling>
           <c:orientation val="minMax"/>
-          <c:max val="125000.0"/>
+          <c:max val="150000.0"/>
           <c:min val="0.0"/>
         </c:scaling>
         <c:delete val="0"/>
@@ -375,7 +375,7 @@
         <c:crossAx val="-2101159928"/>
         <c:crosses val="autoZero"/>
         <c:crossBetween val="midCat"/>
-        <c:majorUnit val="25000.0"/>
+        <c:majorUnit val="50000.0"/>
       </c:valAx>
     </c:plotArea>
     <c:plotVisOnly val="1"/>
@@ -522,64 +522,64 @@
                 <c:formatCode>$#,##0;[Red]($#,##0);"-"</c:formatCode>
                 <c:ptCount val="20"/>
                 <c:pt idx="0">
-                  <c:v>70720</c:v>
+                  <c:v>77350</c:v>
                 </c:pt>
                 <c:pt idx="1">
-                  <c:v>88540</c:v>
+                  <c:v>96790</c:v>
                 </c:pt>
                 <c:pt idx="2">
-                  <c:v>94695</c:v>
+                  <c:v>103515</c:v>
                 </c:pt>
                 <c:pt idx="3">
-                  <c:v>66850</c:v>
+                  <c:v>73060</c:v>
                 </c:pt>
                 <c:pt idx="4">
-                  <c:v>84410</c:v>
+                  <c:v>92075</c:v>
                 </c:pt>
                 <c:pt idx="5">
-                  <c:v>48975</c:v>
+                  <c:v>53340</c:v>
                 </c:pt>
                 <c:pt idx="6">
-                  <c:v>37570</c:v>
+                  <c:v>40885</c:v>
                 </c:pt>
                 <c:pt idx="7">
-                  <c:v>59755</c:v>
+                  <c:v>65570</c:v>
                 </c:pt>
                 <c:pt idx="8">
-                  <c:v>64520</c:v>
+                  <c:v>70760</c:v>
                 </c:pt>
                 <c:pt idx="9">
-                  <c:v>64820</c:v>
+                  <c:v>71205</c:v>
                 </c:pt>
                 <c:pt idx="10">
-                  <c:v>38775</c:v>
+                  <c:v>42845</c:v>
                 </c:pt>
                 <c:pt idx="11">
-                  <c:v>38035</c:v>
+                  <c:v>42050</c:v>
                 </c:pt>
                 <c:pt idx="12">
-                  <c:v>45860</c:v>
+                  <c:v>50650</c:v>
                 </c:pt>
                 <c:pt idx="13">
-                  <c:v>46840</c:v>
+                  <c:v>51775</c:v>
                 </c:pt>
                 <c:pt idx="14">
-                  <c:v>29520</c:v>
+                  <c:v>32800</c:v>
                 </c:pt>
                 <c:pt idx="15">
-                  <c:v>60170</c:v>
+                  <c:v>66950</c:v>
                 </c:pt>
                 <c:pt idx="16">
-                  <c:v>62955</c:v>
+                  <c:v>70035</c:v>
                 </c:pt>
                 <c:pt idx="17">
-                  <c:v>75165</c:v>
+                  <c:v>83115</c:v>
                 </c:pt>
                 <c:pt idx="18">
-                  <c:v>47090</c:v>
+                  <c:v>51865</c:v>
                 </c:pt>
                 <c:pt idx="19">
-                  <c:v>43590</c:v>
+                  <c:v>48120</c:v>
                 </c:pt>
               </c:numCache>
             </c:numRef>
@@ -628,7 +628,7 @@
         <c:axId val="-2100718248"/>
         <c:scaling>
           <c:orientation val="minMax"/>
-          <c:max val="100000.0"/>
+          <c:max val="125000.0"/>
           <c:min val="0.0"/>
         </c:scaling>
         <c:delete val="0"/>
@@ -663,7 +663,7 @@
         <c:crossAx val="-2101159928"/>
         <c:crosses val="autoZero"/>
         <c:crossBetween val="midCat"/>
-        <c:majorUnit val="20000.0"/>
+        <c:majorUnit val="25000.0"/>
       </c:valAx>
     </c:plotArea>
     <c:plotVisOnly val="1"/>
@@ -810,64 +810,64 @@
                 <c:formatCode>$#,##0;[Red]($#,##0);"-"</c:formatCode>
                 <c:ptCount val="20"/>
                 <c:pt idx="0">
-                  <c:v>15000</c:v>
+                  <c:v>16500</c:v>
                 </c:pt>
                 <c:pt idx="1">
-                  <c:v>15000</c:v>
+                  <c:v>16500</c:v>
                 </c:pt>
                 <c:pt idx="2">
-                  <c:v>15000</c:v>
+                  <c:v>16500</c:v>
                 </c:pt>
                 <c:pt idx="3">
-                  <c:v>15000</c:v>
+                  <c:v>16500</c:v>
                 </c:pt>
                 <c:pt idx="4">
-                  <c:v>15000</c:v>
+                  <c:v>16500</c:v>
                 </c:pt>
                 <c:pt idx="5">
-                  <c:v>21800</c:v>
+                  <c:v>24000</c:v>
                 </c:pt>
                 <c:pt idx="6">
-                  <c:v>21800</c:v>
+                  <c:v>24000</c:v>
                 </c:pt>
                 <c:pt idx="7">
-                  <c:v>21800</c:v>
+                  <c:v>24000</c:v>
                 </c:pt>
                 <c:pt idx="8">
-                  <c:v>21800</c:v>
+                  <c:v>24000</c:v>
                 </c:pt>
                 <c:pt idx="9">
-                  <c:v>16300</c:v>
+                  <c:v>17900</c:v>
                 </c:pt>
                 <c:pt idx="10">
-                  <c:v>16300</c:v>
+                  <c:v>17900</c:v>
                 </c:pt>
                 <c:pt idx="11">
-                  <c:v>16300</c:v>
+                  <c:v>17900</c:v>
                 </c:pt>
                 <c:pt idx="12">
-                  <c:v>16300</c:v>
+                  <c:v>17900</c:v>
                 </c:pt>
                 <c:pt idx="13">
-                  <c:v>28300</c:v>
+                  <c:v>31100</c:v>
                 </c:pt>
                 <c:pt idx="14">
-                  <c:v>28300</c:v>
+                  <c:v>31100</c:v>
                 </c:pt>
                 <c:pt idx="15">
-                  <c:v>28300</c:v>
+                  <c:v>31100</c:v>
                 </c:pt>
                 <c:pt idx="16">
-                  <c:v>28300</c:v>
+                  <c:v>31100</c:v>
                 </c:pt>
                 <c:pt idx="17">
-                  <c:v>28300</c:v>
+                  <c:v>31100</c:v>
                 </c:pt>
                 <c:pt idx="18">
-                  <c:v>28300</c:v>
+                  <c:v>31100</c:v>
                 </c:pt>
                 <c:pt idx="19">
-                  <c:v>28300</c:v>
+                  <c:v>31100</c:v>
                 </c:pt>
               </c:numCache>
             </c:numRef>
@@ -916,7 +916,7 @@
         <c:axId val="-2100718248"/>
         <c:scaling>
           <c:orientation val="minMax"/>
-          <c:max val="30000.0"/>
+          <c:max val="40000.0"/>
           <c:min val="0.0"/>
         </c:scaling>
         <c:delete val="0"/>
@@ -1098,64 +1098,64 @@
                 <c:formatCode>$#,##0;[Red]($#,##0);"-"</c:formatCode>
                 <c:ptCount val="20"/>
                 <c:pt idx="0">
-                  <c:v>8800</c:v>
+                  <c:v>9700</c:v>
                 </c:pt>
                 <c:pt idx="1">
-                  <c:v>4600</c:v>
+                  <c:v>5100</c:v>
                 </c:pt>
                 <c:pt idx="2">
-                  <c:v>5200</c:v>
+                  <c:v>5700</c:v>
                 </c:pt>
                 <c:pt idx="3">
-                  <c:v>6400</c:v>
+                  <c:v>7000</c:v>
                 </c:pt>
                 <c:pt idx="4">
-                  <c:v>11600</c:v>
+                  <c:v>12700</c:v>
                 </c:pt>
                 <c:pt idx="5">
-                  <c:v>6400</c:v>
+                  <c:v>7000</c:v>
                 </c:pt>
                 <c:pt idx="6">
-                  <c:v>4600</c:v>
+                  <c:v>5100</c:v>
                 </c:pt>
                 <c:pt idx="7">
-                  <c:v>14000</c:v>
+                  <c:v>15400</c:v>
                 </c:pt>
                 <c:pt idx="8">
-                  <c:v>3900</c:v>
+                  <c:v>4300</c:v>
                 </c:pt>
                 <c:pt idx="9">
-                  <c:v>5200</c:v>
+                  <c:v>5700</c:v>
                 </c:pt>
                 <c:pt idx="10">
-                  <c:v>6400</c:v>
+                  <c:v>7000</c:v>
                 </c:pt>
                 <c:pt idx="11">
-                  <c:v>5200</c:v>
+                  <c:v>5700</c:v>
                 </c:pt>
                 <c:pt idx="12">
-                  <c:v>9100</c:v>
+                  <c:v>10000</c:v>
                 </c:pt>
                 <c:pt idx="13">
-                  <c:v>8800</c:v>
+                  <c:v>9700</c:v>
                 </c:pt>
                 <c:pt idx="14">
-                  <c:v>11600</c:v>
+                  <c:v>12700</c:v>
                 </c:pt>
                 <c:pt idx="15">
-                  <c:v>3900</c:v>
+                  <c:v>4300</c:v>
                 </c:pt>
                 <c:pt idx="16">
-                  <c:v>8800</c:v>
+                  <c:v>9700</c:v>
                 </c:pt>
                 <c:pt idx="17">
-                  <c:v>6400</c:v>
+                  <c:v>7000</c:v>
                 </c:pt>
                 <c:pt idx="18">
-                  <c:v>5200</c:v>
+                  <c:v>5700</c:v>
                 </c:pt>
                 <c:pt idx="19">
-                  <c:v>5200</c:v>
+                  <c:v>5700</c:v>
                 </c:pt>
               </c:numCache>
             </c:numRef>
@@ -1204,7 +1204,7 @@
         <c:axId val="-2100718248"/>
         <c:scaling>
           <c:orientation val="minMax"/>
-          <c:max val="15000.0"/>
+          <c:max val="20000.0"/>
           <c:min val="0.0"/>
         </c:scaling>
         <c:delete val="0"/>
@@ -1729,7 +1729,7 @@
           <a:lstStyle/>
           <a:p>
             <a:r>
-              <a:t>Services · All. May against May last year: (19.3%); Year to date (Jul to May 2026): $891,920; Gross margin, year to date: 64.0%. Revenue is $891,920 this financial year to date (Jul to May 2026). Training makes the highest gross margin (75.1%); Projects the lowest (61.7%). The business needs 93.0% gross margin just to cover overheads. Projects: 61.7% gross margin, 21.7 points over the 40.0% target ($119,872 ahead on $552,820 this financial year to date). Training: 75.1% gross margin, 35.1 points over the 40.0% target ($26,580 ahead on $75,800 this financial year to date).</a:t>
+              <a:t>Services · All. May against May last year: (19.1%); Year to date (Jul to May 2026): $983,910; Gross margin, year to date: 67.4%. Revenue is $983,910 this financial year to date (Jul to May 2026). Training makes the highest gross margin (77.3%); Projects the lowest (65.4%). The business needs 94.1% gross margin just to cover overheads. Projects: 65.4% gross margin, 25.4 points over the 40.0% target ($155,026 ahead on $611,410 this financial year to date). Training: 77.3% gross margin, 37.3 points over the 40.0% target ($31,020 ahead on $83,200 this financial year to date).</a:t>
             </a:r>
           </a:p>
         </p:txBody>
@@ -1799,7 +1799,7 @@
           <a:lstStyle/>
           <a:p>
             <a:r>
-              <a:t>Services · Projects. May against May last year: (27.1%); Year to date (Jul to May 2026): $552,820; Gross margin, year to date: 61.7%. Projects brought in $552,820 this financial year to date, at a 61.7% gross margin (below the 64.0% overall). Projects: 61.7% gross margin, 21.7 points over the 40.0% target ($119,872 ahead on $552,820 this financial year to date).</a:t>
+              <a:t>Services · Projects. May against May last year: (26.6%); Year to date (Jul to May 2026): $611,410; Gross margin, year to date: 65.4%. Projects brought in $611,410 this financial year to date, at a 65.4% gross margin (below the 67.4% overall). Projects: 65.4% gross margin, 25.4 points over the 40.0% target ($155,026 ahead on $611,410 this financial year to date).</a:t>
             </a:r>
           </a:p>
         </p:txBody>
@@ -1869,7 +1869,7 @@
           <a:lstStyle/>
           <a:p>
             <a:r>
-              <a:t>Services · Retainers. May against May last year: 29.8%; Year to date (Jul to May 2026): $263,300; Gross margin, year to date: 65.7%. Retainers brought in $263,300 this financial year to date, at a 65.7% gross margin (above the 64.0% overall). Retainers: 65.7% gross margin, 25.7 points over the 40.0% target ($67,680 ahead on $263,300 this financial year to date).</a:t>
+              <a:t>Services · Retainers. May against May last year: 29.6%; Year to date (Jul to May 2026): $289,300; Gross margin, year to date: 68.8%. Retainers brought in $289,300 this financial year to date, at a 68.8% gross margin (above the 67.4% overall). Retainers: 68.8% gross margin, 28.8 points over the 40.0% target ($83,280 ahead on $289,300 this financial year to date).</a:t>
             </a:r>
           </a:p>
         </p:txBody>
@@ -1939,7 +1939,7 @@
           <a:lstStyle/>
           <a:p>
             <a:r>
-              <a:t>Services · Training. May against May last year: (62.9%); Year to date (Jul to May 2026): $75,800; Gross margin, year to date: 75.1%. Training brought in $75,800 this financial year to date, at a 75.1% gross margin (above the 64.0% overall). Training: 75.1% gross margin, 35.1 points over the 40.0% target ($26,580 ahead on $75,800 this financial year to date).</a:t>
+              <a:t>Services · Training. May against May last year: (63.0%); Year to date (Jul to May 2026): $83,200; Gross margin, year to date: 77.3%. Training brought in $83,200 this financial year to date, at a 77.3% gross margin (above the 67.4% overall). Training: 77.3% gross margin, 37.3 points over the 40.0% target ($31,020 ahead on $83,200 this financial year to date).</a:t>
             </a:r>
           </a:p>
         </p:txBody>
@@ -2009,7 +2009,7 @@
           <a:lstStyle/>
           <a:p>
             <a:r>
-              <a:t>By type of work: financial year to date (Jul to May 2026) against the same period last year · Services. Same period last year: Not available: the data starts October 2024. From gross margin to profit: May's client work made $49,410 gross margin (64.1%). Consultant time not charged to client work took $19,920 and overheads $51,750, leaving ($22,260) profit before tax ((28.9%) of revenue). To cover overheads, client work needs a 93.0% gross margin on average.</a:t>
+              <a:t>By type of work: financial year to date (Jul to May 2026) against the same period last year · Services. Same period last year: Not available: the data starts October 2024. From gross margin to profit: May's client work made $57,240 gross margin (67.4%). Consultant time not charged to client work took $28,140 and overheads $51,750, leaving ($22,650) profit before tax ((26.7%) of revenue). To cover overheads, client work needs a 94.1% gross margin on average.</a:t>
             </a:r>
           </a:p>
         </p:txBody>
@@ -5424,7 +5424,7 @@
                 </a:solidFill>
                 <a:latin typeface="Roboto"/>
               </a:rPr>
-              <a:t>Data retrieved 2pm, Tue 6 Oct 2026 · Generated 8 Oct 2026, 9:35am · Sample data · Made with Python (python-pptx)</a:t>
+              <a:t>Data retrieved 2pm, Tue 6 Oct 2026 · Generated 9 Oct 2026, 8:41am · Sample data · Made with Python (python-pptx)</a:t>
             </a:r>
           </a:p>
         </p:txBody>
@@ -5770,7 +5770,7 @@
                 </a:solidFill>
                 <a:latin typeface="Roboto"/>
               </a:rPr>
-              <a:t>(19.3%)</a:t>
+              <a:t>(19.1%)</a:t>
             </a:r>
           </a:p>
         </p:txBody>
@@ -5809,7 +5809,7 @@
                 </a:solidFill>
                 <a:latin typeface="Roboto"/>
               </a:rPr>
-              <a:t>$77,090 against $95,555</a:t>
+              <a:t>$84,920 against $104,970</a:t>
             </a:r>
           </a:p>
         </p:txBody>
@@ -5936,7 +5936,7 @@
                 </a:solidFill>
                 <a:latin typeface="Roboto"/>
               </a:rPr>
-              <a:t>$891,920</a:t>
+              <a:t>$983,910</a:t>
             </a:r>
           </a:p>
         </p:txBody>
@@ -6102,7 +6102,7 @@
                 </a:solidFill>
                 <a:latin typeface="Roboto"/>
               </a:rPr>
-              <a:t>64.0%</a:t>
+              <a:t>67.4%</a:t>
             </a:r>
           </a:p>
         </p:txBody>
@@ -6141,7 +6141,7 @@
                 </a:solidFill>
                 <a:latin typeface="Roboto"/>
               </a:rPr>
-              <a:t>$570,900 before overheads</a:t>
+              <a:t>$662,890 before overheads</a:t>
             </a:r>
           </a:p>
         </p:txBody>
@@ -6286,7 +6286,7 @@
                 </a:solidFill>
                 <a:latin typeface="Roboto"/>
               </a:rPr>
-              <a:t>Revenue is $891,920 this financial year to date (Jul to May 2026). Training makes the highest gross margin (75.1%); Projects the lowest (61.7%). The business needs 93.0% gross margin just to cover overheads.</a:t>
+              <a:t>Revenue is $983,910 this financial year to date (Jul to May 2026). Training makes the highest gross margin (77.3%); Projects the lowest (65.4%). The business needs 94.1% gross margin just to cover overheads.</a:t>
             </a:r>
           </a:p>
         </p:txBody>
@@ -6413,7 +6413,7 @@
                 </a:solidFill>
                 <a:latin typeface="Roboto"/>
               </a:rPr>
-              <a:t>Projects: 61.7% gross margin, 21.7 points over the 40.0% target ($119,872 ahead on $552,820 this financial year to date). Training: 75.1% gross margin, 35.1 points over the 40.0% target ($26,580 ahead on $75,800 this financial year to date).</a:t>
+              <a:t>Projects: 65.4% gross margin, 25.4 points over the 40.0% target ($155,026 ahead on $611,410 this financial year to date). Training: 77.3% gross margin, 37.3 points over the 40.0% target ($31,020 ahead on $83,200 this financial year to date).</a:t>
             </a:r>
           </a:p>
         </p:txBody>
@@ -6491,7 +6491,7 @@
                 </a:solidFill>
                 <a:latin typeface="Roboto"/>
               </a:rPr>
-              <a:t>Data retrieved 2pm, Tue 6 Oct 2026 · Generated 8 Oct 2026, 9:35am · Sample data · Made with Python (python-pptx)</a:t>
+              <a:t>Data retrieved 2pm, Tue 6 Oct 2026 · Generated 9 Oct 2026, 8:41am · Sample data · Made with Python (python-pptx)</a:t>
             </a:r>
           </a:p>
         </p:txBody>
@@ -6837,7 +6837,7 @@
                 </a:solidFill>
                 <a:latin typeface="Roboto"/>
               </a:rPr>
-              <a:t>(27.1%)</a:t>
+              <a:t>(26.6%)</a:t>
             </a:r>
           </a:p>
         </p:txBody>
@@ -6876,7 +6876,7 @@
                 </a:solidFill>
                 <a:latin typeface="Roboto"/>
               </a:rPr>
-              <a:t>$43,590 against $59,755</a:t>
+              <a:t>$48,120 against $65,570</a:t>
             </a:r>
           </a:p>
         </p:txBody>
@@ -7003,7 +7003,7 @@
                 </a:solidFill>
                 <a:latin typeface="Roboto"/>
               </a:rPr>
-              <a:t>$552,820</a:t>
+              <a:t>$611,410</a:t>
             </a:r>
           </a:p>
         </p:txBody>
@@ -7169,7 +7169,7 @@
                 </a:solidFill>
                 <a:latin typeface="Roboto"/>
               </a:rPr>
-              <a:t>61.7%</a:t>
+              <a:t>65.4%</a:t>
             </a:r>
           </a:p>
         </p:txBody>
@@ -7208,7 +7208,7 @@
                 </a:solidFill>
                 <a:latin typeface="Roboto"/>
               </a:rPr>
-              <a:t>$341,000 before overheads</a:t>
+              <a:t>$399,590 before overheads</a:t>
             </a:r>
           </a:p>
         </p:txBody>
@@ -7353,7 +7353,7 @@
                 </a:solidFill>
                 <a:latin typeface="Roboto"/>
               </a:rPr>
-              <a:t>Projects brought in $552,820 this financial year to date, at a 61.7% gross margin (below the 64.0% overall).</a:t>
+              <a:t>Projects brought in $611,410 this financial year to date, at a 65.4% gross margin (below the 67.4% overall).</a:t>
             </a:r>
           </a:p>
         </p:txBody>
@@ -7480,7 +7480,7 @@
                 </a:solidFill>
                 <a:latin typeface="Roboto"/>
               </a:rPr>
-              <a:t>Projects: 61.7% gross margin, 21.7 points over the 40.0% target ($119,872 ahead on $552,820 this financial year to date).</a:t>
+              <a:t>Projects: 65.4% gross margin, 25.4 points over the 40.0% target ($155,026 ahead on $611,410 this financial year to date).</a:t>
             </a:r>
           </a:p>
         </p:txBody>
@@ -7558,7 +7558,7 @@
                 </a:solidFill>
                 <a:latin typeface="Roboto"/>
               </a:rPr>
-              <a:t>Data retrieved 2pm, Tue 6 Oct 2026 · Generated 8 Oct 2026, 9:35am · Sample data · Made with Python (python-pptx)</a:t>
+              <a:t>Data retrieved 2pm, Tue 6 Oct 2026 · Generated 9 Oct 2026, 8:41am · Sample data · Made with Python (python-pptx)</a:t>
             </a:r>
           </a:p>
         </p:txBody>
@@ -7904,7 +7904,7 @@
                 </a:solidFill>
                 <a:latin typeface="Roboto"/>
               </a:rPr>
-              <a:t>29.8%</a:t>
+              <a:t>29.6%</a:t>
             </a:r>
           </a:p>
         </p:txBody>
@@ -7943,7 +7943,7 @@
                 </a:solidFill>
                 <a:latin typeface="Roboto"/>
               </a:rPr>
-              <a:t>$28,300 against $21,800</a:t>
+              <a:t>$31,100 against $24,000</a:t>
             </a:r>
           </a:p>
         </p:txBody>
@@ -8070,7 +8070,7 @@
                 </a:solidFill>
                 <a:latin typeface="Roboto"/>
               </a:rPr>
-              <a:t>$263,300</a:t>
+              <a:t>$289,300</a:t>
             </a:r>
           </a:p>
         </p:txBody>
@@ -8236,7 +8236,7 @@
                 </a:solidFill>
                 <a:latin typeface="Roboto"/>
               </a:rPr>
-              <a:t>65.7%</a:t>
+              <a:t>68.8%</a:t>
             </a:r>
           </a:p>
         </p:txBody>
@@ -8275,7 +8275,7 @@
                 </a:solidFill>
                 <a:latin typeface="Roboto"/>
               </a:rPr>
-              <a:t>$173,000 before overheads</a:t>
+              <a:t>$199,000 before overheads</a:t>
             </a:r>
           </a:p>
         </p:txBody>
@@ -8420,7 +8420,7 @@
                 </a:solidFill>
                 <a:latin typeface="Roboto"/>
               </a:rPr>
-              <a:t>Retainers brought in $263,300 this financial year to date, at a 65.7% gross margin (above the 64.0% overall).</a:t>
+              <a:t>Retainers brought in $289,300 this financial year to date, at a 68.8% gross margin (above the 67.4% overall).</a:t>
             </a:r>
           </a:p>
         </p:txBody>
@@ -8547,7 +8547,7 @@
                 </a:solidFill>
                 <a:latin typeface="Roboto"/>
               </a:rPr>
-              <a:t>Retainers: 65.7% gross margin, 25.7 points over the 40.0% target ($67,680 ahead on $263,300 this financial year to date).</a:t>
+              <a:t>Retainers: 68.8% gross margin, 28.8 points over the 40.0% target ($83,280 ahead on $289,300 this financial year to date).</a:t>
             </a:r>
           </a:p>
         </p:txBody>
@@ -8625,7 +8625,7 @@
                 </a:solidFill>
                 <a:latin typeface="Roboto"/>
               </a:rPr>
-              <a:t>Data retrieved 2pm, Tue 6 Oct 2026 · Generated 8 Oct 2026, 9:35am · Sample data · Made with Python (python-pptx)</a:t>
+              <a:t>Data retrieved 2pm, Tue 6 Oct 2026 · Generated 9 Oct 2026, 8:41am · Sample data · Made with Python (python-pptx)</a:t>
             </a:r>
           </a:p>
         </p:txBody>
@@ -8971,7 +8971,7 @@
                 </a:solidFill>
                 <a:latin typeface="Roboto"/>
               </a:rPr>
-              <a:t>(62.9%)</a:t>
+              <a:t>(63.0%)</a:t>
             </a:r>
           </a:p>
         </p:txBody>
@@ -9010,7 +9010,7 @@
                 </a:solidFill>
                 <a:latin typeface="Roboto"/>
               </a:rPr>
-              <a:t>$5,200 against $14,000</a:t>
+              <a:t>$5,700 against $15,400</a:t>
             </a:r>
           </a:p>
         </p:txBody>
@@ -9137,7 +9137,7 @@
                 </a:solidFill>
                 <a:latin typeface="Roboto"/>
               </a:rPr>
-              <a:t>$75,800</a:t>
+              <a:t>$83,200</a:t>
             </a:r>
           </a:p>
         </p:txBody>
@@ -9303,7 +9303,7 @@
                 </a:solidFill>
                 <a:latin typeface="Roboto"/>
               </a:rPr>
-              <a:t>75.1%</a:t>
+              <a:t>77.3%</a:t>
             </a:r>
           </a:p>
         </p:txBody>
@@ -9342,7 +9342,7 @@
                 </a:solidFill>
                 <a:latin typeface="Roboto"/>
               </a:rPr>
-              <a:t>$56,900 before overheads</a:t>
+              <a:t>$64,300 before overheads</a:t>
             </a:r>
           </a:p>
         </p:txBody>
@@ -9487,7 +9487,7 @@
                 </a:solidFill>
                 <a:latin typeface="Roboto"/>
               </a:rPr>
-              <a:t>Training brought in $75,800 this financial year to date, at a 75.1% gross margin (above the 64.0% overall).</a:t>
+              <a:t>Training brought in $83,200 this financial year to date, at a 77.3% gross margin (above the 67.4% overall).</a:t>
             </a:r>
           </a:p>
         </p:txBody>
@@ -9614,7 +9614,7 @@
                 </a:solidFill>
                 <a:latin typeface="Roboto"/>
               </a:rPr>
-              <a:t>Training: 75.1% gross margin, 35.1 points over the 40.0% target ($26,580 ahead on $75,800 this financial year to date).</a:t>
+              <a:t>Training: 77.3% gross margin, 37.3 points over the 40.0% target ($31,020 ahead on $83,200 this financial year to date).</a:t>
             </a:r>
           </a:p>
         </p:txBody>
@@ -9692,7 +9692,7 @@
                 </a:solidFill>
                 <a:latin typeface="Roboto"/>
               </a:rPr>
-              <a:t>Data retrieved 2pm, Tue 6 Oct 2026 · Generated 8 Oct 2026, 9:35am · Sample data · Made with Python (python-pptx)</a:t>
+              <a:t>Data retrieved 2pm, Tue 6 Oct 2026 · Generated 9 Oct 2026, 8:41am · Sample data · Made with Python (python-pptx)</a:t>
             </a:r>
           </a:p>
         </p:txBody>
@@ -9911,7 +9911,7 @@
                 </a:solidFill>
                 <a:latin typeface="Roboto"/>
               </a:rPr>
-              <a:t>Same period last year: Not available: the data starts October 2024. From gross margin to profit: May's client work made $49,410 gross margin (64.1%). Consultant time not charged to client work took $19,920 and overheads $51,750, leaving ($22,260) profit before tax ((28.9%) of revenue). To cover overheads, client work needs a 93.0% gross margin on average.</a:t>
+              <a:t>Same period last year: Not available: the data starts October 2024. From gross margin to profit: May's client work made $57,240 gross margin (67.4%). Consultant time not charged to client work took $28,140 and overheads $51,750, leaving ($22,650) profit before tax ((26.7%) of revenue). To cover overheads, client work needs a 94.1% gross margin on average.</a:t>
             </a:r>
           </a:p>
         </p:txBody>
@@ -10142,7 +10142,7 @@
                           </a:solidFill>
                           <a:latin typeface="Roboto"/>
                         </a:rPr>
-                        <a:t>$552,820</a:t>
+                        <a:t>$611,410</a:t>
                       </a:r>
                     </a:p>
                   </a:txBody>
@@ -10223,7 +10223,7 @@
                           </a:solidFill>
                           <a:latin typeface="Roboto"/>
                         </a:rPr>
-                        <a:t>$341,000</a:t>
+                        <a:t>$399,590</a:t>
                       </a:r>
                     </a:p>
                   </a:txBody>
@@ -10250,7 +10250,7 @@
                           </a:solidFill>
                           <a:latin typeface="Roboto"/>
                         </a:rPr>
-                        <a:t>61.7%</a:t>
+                        <a:t>65.4%</a:t>
                       </a:r>
                     </a:p>
                   </a:txBody>
@@ -10306,7 +10306,7 @@
                           </a:solidFill>
                           <a:latin typeface="Roboto"/>
                         </a:rPr>
-                        <a:t>$263,300</a:t>
+                        <a:t>$289,300</a:t>
                       </a:r>
                     </a:p>
                   </a:txBody>
@@ -10387,7 +10387,7 @@
                           </a:solidFill>
                           <a:latin typeface="Roboto"/>
                         </a:rPr>
-                        <a:t>$173,000</a:t>
+                        <a:t>$199,000</a:t>
                       </a:r>
                     </a:p>
                   </a:txBody>
@@ -10414,7 +10414,7 @@
                           </a:solidFill>
                           <a:latin typeface="Roboto"/>
                         </a:rPr>
-                        <a:t>65.7%</a:t>
+                        <a:t>68.8%</a:t>
                       </a:r>
                     </a:p>
                   </a:txBody>
@@ -10470,7 +10470,7 @@
                           </a:solidFill>
                           <a:latin typeface="Roboto"/>
                         </a:rPr>
-                        <a:t>$75,800</a:t>
+                        <a:t>$83,200</a:t>
                       </a:r>
                     </a:p>
                   </a:txBody>
@@ -10551,7 +10551,7 @@
                           </a:solidFill>
                           <a:latin typeface="Roboto"/>
                         </a:rPr>
-                        <a:t>$56,900</a:t>
+                        <a:t>$64,300</a:t>
                       </a:r>
                     </a:p>
                   </a:txBody>
@@ -10578,7 +10578,7 @@
                           </a:solidFill>
                           <a:latin typeface="Roboto"/>
                         </a:rPr>
-                        <a:t>75.1%</a:t>
+                        <a:t>77.3%</a:t>
                       </a:r>
                     </a:p>
                   </a:txBody>
@@ -10634,7 +10634,7 @@
                           </a:solidFill>
                           <a:latin typeface="Roboto"/>
                         </a:rPr>
-                        <a:t>$891,920</a:t>
+                        <a:t>$983,910</a:t>
                       </a:r>
                     </a:p>
                   </a:txBody>
@@ -10715,7 +10715,7 @@
                           </a:solidFill>
                           <a:latin typeface="Roboto"/>
                         </a:rPr>
-                        <a:t>$570,900</a:t>
+                        <a:t>$662,890</a:t>
                       </a:r>
                     </a:p>
                   </a:txBody>
@@ -10742,7 +10742,7 @@
                           </a:solidFill>
                           <a:latin typeface="Roboto"/>
                         </a:rPr>
-                        <a:t>64.0%</a:t>
+                        <a:t>67.4%</a:t>
                       </a:r>
                     </a:p>
                   </a:txBody>
@@ -10830,7 +10830,7 @@
                 </a:solidFill>
                 <a:latin typeface="Roboto"/>
               </a:rPr>
-              <a:t>Data retrieved 2pm, Tue 6 Oct 2026 · Generated 8 Oct 2026, 9:35am · Sample data · Made with Python (python-pptx)</a:t>
+              <a:t>Data retrieved 2pm, Tue 6 Oct 2026 · Generated 9 Oct 2026, 8:41am · Sample data · Made with Python (python-pptx)</a:t>
             </a:r>
           </a:p>
         </p:txBody>
